--- a/public/fun/pack/pptx/reviewpro/보장점검양식프리미엄_08_가족점검_아이스블루.pptx
+++ b/public/fun/pack/pptx/reviewpro/보장점검양식프리미엄_08_가족점검_아이스블루.pptx
@@ -112,12 +112,12 @@
   <p:extLst>
     <p:ext uri="{521415D9-36F7-43E2-AB2F-B90AF26B5E84}">
       <p14:sectionLst xmlns:p14="http://schemas.microsoft.com/office/powerpoint/2010/main">
-        <p14:section name="시작" id="{63B83EF3-682B-4FE2-9008-3FDBC4DCBFE3}">
+        <p14:section name="시작" id="{D967714E-618E-4B24-AFC1-E0FE5F8AB120}">
           <p14:sldIdLst>
             <p14:sldId id="256"/>
           </p14:sldIdLst>
         </p14:section>
-        <p14:section name="본문" id="{79C08987-7F6C-4DF6-B72B-D3F168C180E4}">
+        <p14:section name="본문" id="{6EF93274-0C84-4A9D-9AF2-FA861184DAED}">
           <p14:sldIdLst>
             <p14:sldId id="257"/>
             <p14:sldId id="258"/>
@@ -1655,7 +1655,7 @@
             </a:lvl1pPr>
           </a:lstStyle>
           <a:p>
-            <a:fld id="{D09D9C5A-3827-4755-9898-4D48D7C7A5E0}" type="slidenum">
+            <a:fld id="{C6FB4595-2DC6-4671-93A8-C89C54E323CA}" type="slidenum">
               <a:rPr lang="en-US"/>
               <a:t>‹#›</a:t>
             </a:fld>
@@ -2323,7 +2323,7 @@
             </a:lvl1pPr>
           </a:lstStyle>
           <a:p>
-            <a:fld id="{72BECBBE-B390-43E7-9194-0FE8D260A3E8}" type="slidenum">
+            <a:fld id="{41C9A6B9-0B40-4BFA-8BA6-C5D6645AAA10}" type="slidenum">
               <a:rPr lang="en-US"/>
               <a:t>‹#›</a:t>
             </a:fld>
@@ -2920,7 +2920,7 @@
             </a:lvl1pPr>
           </a:lstStyle>
           <a:p>
-            <a:fld id="{37443DD1-02B1-40BA-BF01-71A13F3FBFDD}" type="slidenum">
+            <a:fld id="{67086F78-5A72-45AC-ADAF-23C36C98B13F}" type="slidenum">
               <a:rPr lang="en-US"/>
               <a:t>‹#›</a:t>
             </a:fld>
@@ -3745,7 +3745,7 @@
           <a:p>
             <a:r>
               <a:rPr lang="ko-KR"/>
-              <a:t>가족 점검 · 0000. 00. 00</a:t>
+              <a:t>가족 점검 · 날짜 입력</a:t>
             </a:r>
           </a:p>
           <a:p>
@@ -3836,7 +3836,7 @@
           <a:bodyPr/>
           <a:lstStyle/>
           <a:p>
-            <a:fld id="{4E7D0945-FC24-47FD-B5C9-78315AF1FCEA}" type="slidenum">
+            <a:fld id="{85BF07FF-87AE-47ED-9555-CA2B6AFDC22C}" type="slidenum">
               <a:rPr lang="en-US"/>
               <a:t>‹#›</a:t>
             </a:fld>
@@ -4746,7 +4746,7 @@
           <a:bodyPr/>
           <a:lstStyle/>
           <a:p>
-            <a:fld id="{B3F32F9B-E723-40F1-9E7A-B1FBE7FB9A50}" type="slidenum">
+            <a:fld id="{AF7DBA22-02F9-4BA7-AAE5-941763DA906A}" type="slidenum">
               <a:rPr lang="en-US"/>
               <a:t>‹#›</a:t>
             </a:fld>
@@ -6252,7 +6252,7 @@
           <a:bodyPr/>
           <a:lstStyle/>
           <a:p>
-            <a:fld id="{DEE6A49E-A914-4004-AD9F-CF695E42B0FD}" type="slidenum">
+            <a:fld id="{A157CE97-2350-403C-B76A-380EB38A0349}" type="slidenum">
               <a:rPr lang="en-US"/>
               <a:t>‹#›</a:t>
             </a:fld>
@@ -7802,7 +7802,7 @@
           <a:bodyPr/>
           <a:lstStyle/>
           <a:p>
-            <a:fld id="{758B1765-2E2D-4979-989D-C74BE4BFBEF2}" type="slidenum">
+            <a:fld id="{86B0C731-4CB8-4CCA-97C3-D8554799B919}" type="slidenum">
               <a:rPr lang="en-US"/>
               <a:t>‹#›</a:t>
             </a:fld>
@@ -8679,7 +8679,7 @@
           <a:bodyPr/>
           <a:lstStyle/>
           <a:p>
-            <a:fld id="{C26AF60E-4E7A-496E-96DC-70F18EE0C6F4}" type="slidenum">
+            <a:fld id="{D99FE59E-F245-4C19-8CDA-BDF981F410A1}" type="slidenum">
               <a:rPr lang="en-US"/>
               <a:t>‹#›</a:t>
             </a:fld>
